--- a/classes/parte-5-explotacion-de-sistemas-y-binarios/134-analisis-dinamico-y-debugging-de-binarios/clase-134-presentacion.pptx
+++ b/classes/parte-5-explotacion-de-sistemas-y-binarios/134-analisis-dinamico-y-debugging-de-binarios/clase-134-presentacion.pptx
@@ -17,6 +17,9 @@
     <p:sldId id="265" r:id="rId16"/>
     <p:sldId id="266" r:id="rId17"/>
     <p:sldId id="267" r:id="rId18"/>
+    <p:sldId id="268" r:id="rId19"/>
+    <p:sldId id="269" r:id="rId20"/>
+    <p:sldId id="270" r:id="rId21"/>
   </p:sldIdLst>
   <p:sldSz cx="9144000" cy="6858000" type="screen4x3"/>
   <p:notesSz cx="6858000" cy="9144000"/>
@@ -3198,7 +3201,7 @@
                   <a:srgbClr val="0B3D2E"/>
                 </a:solidFill>
               </a:rPr>
-              <a:t>⚠️ Errores comunes</a:t>
+              <a:t>✍️ Ejercicios</a:t>
             </a:r>
           </a:p>
         </p:txBody>
@@ -3236,67 +3239,82 @@
                   <a:srgbClr val="22282E"/>
                 </a:solidFill>
               </a:rPr>
-              <a:t>•  ltrace no muestra nada — Binario estático o anti-ltrace; usa GDB/Frida</a:t>
-            </a:r>
-          </a:p>
-          <a:p>
-            <a:pPr>
-              <a:spcAft>
-                <a:spcPts val="600"/>
-              </a:spcAft>
-            </a:pPr>
-            <a:r>
-              <a:rPr sz="1500">
-                <a:solidFill>
-                  <a:srgbClr val="22282E"/>
-                </a:solidFill>
-              </a:rPr>
-              <a:t>•  Frida "cannot find module" — Nombre de export incorrecto; usa null para el binario principal</a:t>
-            </a:r>
-          </a:p>
-          <a:p>
-            <a:pPr>
-              <a:spcAft>
-                <a:spcPts val="600"/>
-              </a:spcAft>
-            </a:pPr>
-            <a:r>
-              <a:rPr sz="1500">
-                <a:solidFill>
-                  <a:srgbClr val="22282E"/>
-                </a:solidFill>
-              </a:rPr>
-              <a:t>•  Breakpoint condicional nunca dispara — Condición mal escrita; revisa el registro</a:t>
-            </a:r>
-          </a:p>
-          <a:p>
-            <a:pPr>
-              <a:spcAft>
-                <a:spcPts val="600"/>
-              </a:spcAft>
-            </a:pPr>
-            <a:r>
-              <a:rPr sz="1500">
-                <a:solidFill>
-                  <a:srgbClr val="22282E"/>
-                </a:solidFill>
-              </a:rPr>
-              <a:t>•  Ejecutas malware en el host — ¡Riesgo! Usa VM aislada con snapshot</a:t>
-            </a:r>
-          </a:p>
-          <a:p>
-            <a:pPr>
-              <a:spcAft>
-                <a:spcPts val="600"/>
-              </a:spcAft>
-            </a:pPr>
-            <a:r>
-              <a:rPr sz="1500">
-                <a:solidFill>
-                  <a:srgbClr val="22282E"/>
-                </a:solidFill>
-              </a:rPr>
-              <a:t>•  Cadena vacía en el dump — Rango/offset erróneo; ajusta con x/s antes</a:t>
+              <a:t>•  Encuentra la clave de un crackme usando solo ltrace.</a:t>
+            </a:r>
+          </a:p>
+          <a:p>
+            <a:pPr>
+              <a:spcAft>
+                <a:spcPts val="600"/>
+              </a:spcAft>
+            </a:pPr>
+            <a:r>
+              <a:rPr sz="1500">
+                <a:solidFill>
+                  <a:srgbClr val="22282E"/>
+                </a:solidFill>
+              </a:rPr>
+              <a:t>•  Escribe un script GDB que registre cada strcmp sin detenerse.</a:t>
+            </a:r>
+          </a:p>
+          <a:p>
+            <a:pPr>
+              <a:spcAft>
+                <a:spcPts val="600"/>
+              </a:spcAft>
+            </a:pPr>
+            <a:r>
+              <a:rPr sz="1500">
+                <a:solidFill>
+                  <a:srgbClr val="22282E"/>
+                </a:solidFill>
+              </a:rPr>
+              <a:t>•  Hookea con Frida una función y modifica su valor de retorno.</a:t>
+            </a:r>
+          </a:p>
+          <a:p>
+            <a:pPr>
+              <a:spcAft>
+                <a:spcPts val="600"/>
+              </a:spcAft>
+            </a:pPr>
+            <a:r>
+              <a:rPr sz="1500">
+                <a:solidFill>
+                  <a:srgbClr val="22282E"/>
+                </a:solidFill>
+              </a:rPr>
+              <a:t>•  Diferencia qué revela strace frente a ltrace.</a:t>
+            </a:r>
+          </a:p>
+          <a:p>
+            <a:pPr>
+              <a:spcAft>
+                <a:spcPts val="600"/>
+              </a:spcAft>
+            </a:pPr>
+            <a:r>
+              <a:rPr sz="1500">
+                <a:solidFill>
+                  <a:srgbClr val="22282E"/>
+                </a:solidFill>
+              </a:rPr>
+              <a:t>•  Emula una función pequeña con Qiling y compara con la ejecución real.</a:t>
+            </a:r>
+          </a:p>
+          <a:p>
+            <a:pPr>
+              <a:spcAft>
+                <a:spcPts val="600"/>
+              </a:spcAft>
+            </a:pPr>
+            <a:r>
+              <a:rPr sz="1500">
+                <a:solidFill>
+                  <a:srgbClr val="22282E"/>
+                </a:solidFill>
+              </a:rPr>
+              <a:t>•  Extrae una cadena descifrada de memoria con dump memory.</a:t>
             </a:r>
           </a:p>
         </p:txBody>
@@ -3347,7 +3365,7 @@
                   <a:srgbClr val="0B3D2E"/>
                 </a:solidFill>
               </a:rPr>
-              <a:t>❓ Preguntas frecuentes</a:t>
+              <a:t>📝 Reto verificable</a:t>
             </a:r>
           </a:p>
         </p:txBody>
@@ -3385,67 +3403,52 @@
                   <a:srgbClr val="22282E"/>
                 </a:solidFill>
               </a:rPr>
-              <a:t>•  ❓ ¿ltrace o strace? ltrace para funciones de librería (más legible); strace para syscalls</a:t>
-            </a:r>
-          </a:p>
-          <a:p>
-            <a:pPr>
-              <a:spcAft>
-                <a:spcPts val="600"/>
-              </a:spcAft>
-            </a:pPr>
-            <a:r>
-              <a:rPr sz="1500">
-                <a:solidFill>
-                  <a:srgbClr val="22282E"/>
-                </a:solidFill>
-              </a:rPr>
-              <a:t>•  (útil cuando no hay imports dinámicos claros).</a:t>
-            </a:r>
-          </a:p>
-          <a:p>
-            <a:pPr>
-              <a:spcAft>
-                <a:spcPts val="600"/>
-              </a:spcAft>
-            </a:pPr>
-            <a:r>
-              <a:rPr sz="1500">
-                <a:solidFill>
-                  <a:srgbClr val="22282E"/>
-                </a:solidFill>
-              </a:rPr>
-              <a:t>•  ❓ ¿Frida solo para móvil? No: funciona en Linux/Windows/macOS y es excelente para desktop y CTF.</a:t>
-            </a:r>
-          </a:p>
-          <a:p>
-            <a:pPr>
-              <a:spcAft>
-                <a:spcPts val="600"/>
-              </a:spcAft>
-            </a:pPr>
-            <a:r>
-              <a:rPr sz="1500">
-                <a:solidFill>
-                  <a:srgbClr val="22282E"/>
-                </a:solidFill>
-              </a:rPr>
-              <a:t>•  ❓ ¿Cuándo emular? Cuando quieres ejecutar una rutina de descifrado aislada sin montar todo el</a:t>
-            </a:r>
-          </a:p>
-          <a:p>
-            <a:pPr>
-              <a:spcAft>
-                <a:spcPts val="600"/>
-              </a:spcAft>
-            </a:pPr>
-            <a:r>
-              <a:rPr sz="1500">
-                <a:solidFill>
-                  <a:srgbClr val="22282E"/>
-                </a:solidFill>
-              </a:rPr>
-              <a:t>•  entorno del binario.</a:t>
+              <a:t>•  Deduce la clave de un crackme que descifra su comparación en runtime, usando análisis dinámico</a:t>
+            </a:r>
+          </a:p>
+          <a:p>
+            <a:pPr>
+              <a:spcAft>
+                <a:spcPts val="600"/>
+              </a:spcAft>
+            </a:pPr>
+            <a:r>
+              <a:rPr sz="1500">
+                <a:solidFill>
+                  <a:srgbClr val="22282E"/>
+                </a:solidFill>
+              </a:rPr>
+              <a:t>•  (ltrace, GDB o Frida).</a:t>
+            </a:r>
+          </a:p>
+          <a:p>
+            <a:pPr>
+              <a:spcAft>
+                <a:spcPts val="600"/>
+              </a:spcAft>
+            </a:pPr>
+            <a:r>
+              <a:rPr sz="1500">
+                <a:solidFill>
+                  <a:srgbClr val="22282E"/>
+                </a:solidFill>
+              </a:rPr>
+              <a:t>•  Criterio de aceptación: obtienes la clave correcta y explicas con qué herramienta/hook la</a:t>
+            </a:r>
+          </a:p>
+          <a:p>
+            <a:pPr>
+              <a:spcAft>
+                <a:spcPts val="600"/>
+              </a:spcAft>
+            </a:pPr>
+            <a:r>
+              <a:rPr sz="1500">
+                <a:solidFill>
+                  <a:srgbClr val="22282E"/>
+                </a:solidFill>
+              </a:rPr>
+              <a:t>•  capturaste en el momento de la comparación.</a:t>
             </a:r>
           </a:p>
         </p:txBody>
@@ -3496,7 +3499,7 @@
                   <a:srgbClr val="0B3D2E"/>
                 </a:solidFill>
               </a:rPr>
-              <a:t>🔗 Referencias</a:t>
+              <a:t>⚠️ Errores comunes</a:t>
             </a:r>
           </a:p>
         </p:txBody>
@@ -3534,6 +3537,304 @@
                   <a:srgbClr val="22282E"/>
                 </a:solidFill>
               </a:rPr>
+              <a:t>•  ltrace no muestra nada — Binario estático o anti-ltrace; usa GDB/Frida</a:t>
+            </a:r>
+          </a:p>
+          <a:p>
+            <a:pPr>
+              <a:spcAft>
+                <a:spcPts val="600"/>
+              </a:spcAft>
+            </a:pPr>
+            <a:r>
+              <a:rPr sz="1500">
+                <a:solidFill>
+                  <a:srgbClr val="22282E"/>
+                </a:solidFill>
+              </a:rPr>
+              <a:t>•  Frida "cannot find module" — Nombre de export incorrecto; usa null para el binario principal</a:t>
+            </a:r>
+          </a:p>
+          <a:p>
+            <a:pPr>
+              <a:spcAft>
+                <a:spcPts val="600"/>
+              </a:spcAft>
+            </a:pPr>
+            <a:r>
+              <a:rPr sz="1500">
+                <a:solidFill>
+                  <a:srgbClr val="22282E"/>
+                </a:solidFill>
+              </a:rPr>
+              <a:t>•  Breakpoint condicional nunca dispara — Condición mal escrita; revisa el registro</a:t>
+            </a:r>
+          </a:p>
+          <a:p>
+            <a:pPr>
+              <a:spcAft>
+                <a:spcPts val="600"/>
+              </a:spcAft>
+            </a:pPr>
+            <a:r>
+              <a:rPr sz="1500">
+                <a:solidFill>
+                  <a:srgbClr val="22282E"/>
+                </a:solidFill>
+              </a:rPr>
+              <a:t>•  Ejecutas malware en el host — ¡Riesgo! Usa VM aislada con snapshot</a:t>
+            </a:r>
+          </a:p>
+          <a:p>
+            <a:pPr>
+              <a:spcAft>
+                <a:spcPts val="600"/>
+              </a:spcAft>
+            </a:pPr>
+            <a:r>
+              <a:rPr sz="1500">
+                <a:solidFill>
+                  <a:srgbClr val="22282E"/>
+                </a:solidFill>
+              </a:rPr>
+              <a:t>•  Cadena vacía en el dump — Rango/offset erróneo; ajusta con x/s antes</a:t>
+            </a:r>
+          </a:p>
+        </p:txBody>
+      </p:sp>
+    </p:spTree>
+  </p:cSld>
+  <p:clrMapOvr>
+    <a:masterClrMapping/>
+  </p:clrMapOvr>
+</p:sld>
+</file>
+
+<file path=ppt/slides/slide13.xml><?xml version="1.0" encoding="utf-8"?>
+<p:sld xmlns:a="http://schemas.openxmlformats.org/drawingml/2006/main" xmlns:p="http://schemas.openxmlformats.org/presentationml/2006/main" xmlns:r="http://schemas.openxmlformats.org/officeDocument/2006/relationships">
+  <p:cSld>
+    <p:spTree>
+      <p:nvGrpSpPr>
+        <p:cNvPr id="1" name=""/>
+        <p:cNvGrpSpPr/>
+        <p:nvPr/>
+      </p:nvGrpSpPr>
+      <p:grpSpPr/>
+      <p:sp>
+        <p:nvSpPr>
+          <p:cNvPr id="2" name="TextBox 1"/>
+          <p:cNvSpPr txBox="1"/>
+          <p:nvPr/>
+        </p:nvSpPr>
+        <p:spPr>
+          <a:xfrm>
+            <a:off x="457200" y="320040"/>
+            <a:ext cx="8229600" cy="822960"/>
+          </a:xfrm>
+          <a:prstGeom prst="rect">
+            <a:avLst/>
+          </a:prstGeom>
+          <a:noFill/>
+        </p:spPr>
+        <p:txBody>
+          <a:bodyPr wrap="square">
+            <a:spAutoFit/>
+          </a:bodyPr>
+          <a:lstStyle/>
+          <a:p>
+            <a:r>
+              <a:rPr sz="2600" b="1">
+                <a:solidFill>
+                  <a:srgbClr val="0B3D2E"/>
+                </a:solidFill>
+              </a:rPr>
+              <a:t>❓ Preguntas frecuentes</a:t>
+            </a:r>
+          </a:p>
+        </p:txBody>
+      </p:sp>
+      <p:sp>
+        <p:nvSpPr>
+          <p:cNvPr id="3" name="TextBox 2"/>
+          <p:cNvSpPr txBox="1"/>
+          <p:nvPr/>
+        </p:nvSpPr>
+        <p:spPr>
+          <a:xfrm>
+            <a:off x="457200" y="1280160"/>
+            <a:ext cx="8229600" cy="4937760"/>
+          </a:xfrm>
+          <a:prstGeom prst="rect">
+            <a:avLst/>
+          </a:prstGeom>
+          <a:noFill/>
+        </p:spPr>
+        <p:txBody>
+          <a:bodyPr wrap="square">
+            <a:spAutoFit/>
+          </a:bodyPr>
+          <a:lstStyle/>
+          <a:p>
+            <a:pPr>
+              <a:spcAft>
+                <a:spcPts val="600"/>
+              </a:spcAft>
+            </a:pPr>
+            <a:r>
+              <a:rPr sz="1500">
+                <a:solidFill>
+                  <a:srgbClr val="22282E"/>
+                </a:solidFill>
+              </a:rPr>
+              <a:t>•  ❓ ¿ltrace o strace? ltrace para funciones de librería (más legible); strace para syscalls</a:t>
+            </a:r>
+          </a:p>
+          <a:p>
+            <a:pPr>
+              <a:spcAft>
+                <a:spcPts val="600"/>
+              </a:spcAft>
+            </a:pPr>
+            <a:r>
+              <a:rPr sz="1500">
+                <a:solidFill>
+                  <a:srgbClr val="22282E"/>
+                </a:solidFill>
+              </a:rPr>
+              <a:t>•  (útil cuando no hay imports dinámicos claros).</a:t>
+            </a:r>
+          </a:p>
+          <a:p>
+            <a:pPr>
+              <a:spcAft>
+                <a:spcPts val="600"/>
+              </a:spcAft>
+            </a:pPr>
+            <a:r>
+              <a:rPr sz="1500">
+                <a:solidFill>
+                  <a:srgbClr val="22282E"/>
+                </a:solidFill>
+              </a:rPr>
+              <a:t>•  ❓ ¿Frida solo para móvil? No: funciona en Linux/Windows/macOS y es excelente para desktop y CTF.</a:t>
+            </a:r>
+          </a:p>
+          <a:p>
+            <a:pPr>
+              <a:spcAft>
+                <a:spcPts val="600"/>
+              </a:spcAft>
+            </a:pPr>
+            <a:r>
+              <a:rPr sz="1500">
+                <a:solidFill>
+                  <a:srgbClr val="22282E"/>
+                </a:solidFill>
+              </a:rPr>
+              <a:t>•  ❓ ¿Cuándo emular? Cuando quieres ejecutar una rutina de descifrado aislada sin montar todo el</a:t>
+            </a:r>
+          </a:p>
+          <a:p>
+            <a:pPr>
+              <a:spcAft>
+                <a:spcPts val="600"/>
+              </a:spcAft>
+            </a:pPr>
+            <a:r>
+              <a:rPr sz="1500">
+                <a:solidFill>
+                  <a:srgbClr val="22282E"/>
+                </a:solidFill>
+              </a:rPr>
+              <a:t>•  entorno del binario.</a:t>
+            </a:r>
+          </a:p>
+        </p:txBody>
+      </p:sp>
+    </p:spTree>
+  </p:cSld>
+  <p:clrMapOvr>
+    <a:masterClrMapping/>
+  </p:clrMapOvr>
+</p:sld>
+</file>
+
+<file path=ppt/slides/slide14.xml><?xml version="1.0" encoding="utf-8"?>
+<p:sld xmlns:a="http://schemas.openxmlformats.org/drawingml/2006/main" xmlns:p="http://schemas.openxmlformats.org/presentationml/2006/main" xmlns:r="http://schemas.openxmlformats.org/officeDocument/2006/relationships">
+  <p:cSld>
+    <p:spTree>
+      <p:nvGrpSpPr>
+        <p:cNvPr id="1" name=""/>
+        <p:cNvGrpSpPr/>
+        <p:nvPr/>
+      </p:nvGrpSpPr>
+      <p:grpSpPr/>
+      <p:sp>
+        <p:nvSpPr>
+          <p:cNvPr id="2" name="TextBox 1"/>
+          <p:cNvSpPr txBox="1"/>
+          <p:nvPr/>
+        </p:nvSpPr>
+        <p:spPr>
+          <a:xfrm>
+            <a:off x="457200" y="320040"/>
+            <a:ext cx="8229600" cy="822960"/>
+          </a:xfrm>
+          <a:prstGeom prst="rect">
+            <a:avLst/>
+          </a:prstGeom>
+          <a:noFill/>
+        </p:spPr>
+        <p:txBody>
+          <a:bodyPr wrap="square">
+            <a:spAutoFit/>
+          </a:bodyPr>
+          <a:lstStyle/>
+          <a:p>
+            <a:r>
+              <a:rPr sz="2600" b="1">
+                <a:solidFill>
+                  <a:srgbClr val="0B3D2E"/>
+                </a:solidFill>
+              </a:rPr>
+              <a:t>🔗 Referencias</a:t>
+            </a:r>
+          </a:p>
+        </p:txBody>
+      </p:sp>
+      <p:sp>
+        <p:nvSpPr>
+          <p:cNvPr id="3" name="TextBox 2"/>
+          <p:cNvSpPr txBox="1"/>
+          <p:nvPr/>
+        </p:nvSpPr>
+        <p:spPr>
+          <a:xfrm>
+            <a:off x="457200" y="1280160"/>
+            <a:ext cx="8229600" cy="4937760"/>
+          </a:xfrm>
+          <a:prstGeom prst="rect">
+            <a:avLst/>
+          </a:prstGeom>
+          <a:noFill/>
+        </p:spPr>
+        <p:txBody>
+          <a:bodyPr wrap="square">
+            <a:spAutoFit/>
+          </a:bodyPr>
+          <a:lstStyle/>
+          <a:p>
+            <a:pPr>
+              <a:spcAft>
+                <a:spcPts val="600"/>
+              </a:spcAft>
+            </a:pPr>
+            <a:r>
+              <a:rPr sz="1500">
+                <a:solidFill>
+                  <a:srgbClr val="22282E"/>
+                </a:solidFill>
+              </a:rPr>
               <a:t>•  Andriesse, D. Practical Binary Analysis, cap. 9. No Starch Press.</a:t>
             </a:r>
           </a:p>
@@ -3584,6 +3885,81 @@
           </a:p>
         </p:txBody>
       </p:sp>
+    </p:spTree>
+  </p:cSld>
+  <p:clrMapOvr>
+    <a:masterClrMapping/>
+  </p:clrMapOvr>
+</p:sld>
+</file>
+
+<file path=ppt/slides/slide15.xml><?xml version="1.0" encoding="utf-8"?>
+<p:sld xmlns:a="http://schemas.openxmlformats.org/drawingml/2006/main" xmlns:p="http://schemas.openxmlformats.org/presentationml/2006/main" xmlns:r="http://schemas.openxmlformats.org/officeDocument/2006/relationships">
+  <p:cSld>
+    <p:spTree>
+      <p:nvGrpSpPr>
+        <p:cNvPr id="1" name=""/>
+        <p:cNvGrpSpPr/>
+        <p:nvPr/>
+      </p:nvGrpSpPr>
+      <p:grpSpPr/>
+      <p:sp>
+        <p:nvSpPr>
+          <p:cNvPr id="2" name="TextBox 1"/>
+          <p:cNvSpPr txBox="1"/>
+          <p:nvPr/>
+        </p:nvSpPr>
+        <p:spPr>
+          <a:xfrm>
+            <a:off x="457200" y="274320"/>
+            <a:ext cx="8229600" cy="640080"/>
+          </a:xfrm>
+          <a:prstGeom prst="rect">
+            <a:avLst/>
+          </a:prstGeom>
+          <a:noFill/>
+        </p:spPr>
+        <p:txBody>
+          <a:bodyPr wrap="square">
+            <a:spAutoFit/>
+          </a:bodyPr>
+          <a:lstStyle/>
+          <a:p>
+            <a:r>
+              <a:rPr sz="2200" b="1">
+                <a:solidFill>
+                  <a:srgbClr val="0B3D2E"/>
+                </a:solidFill>
+              </a:rPr>
+              <a:t>Diagrama de la clase</a:t>
+            </a:r>
+          </a:p>
+        </p:txBody>
+      </p:sp>
+      <p:pic>
+        <p:nvPicPr>
+          <p:cNvPr id="3" name="Picture 2" descr="73b0513f49f8a636.png"/>
+          <p:cNvPicPr>
+            <a:picLocks noChangeAspect="1"/>
+          </p:cNvPicPr>
+          <p:nvPr/>
+        </p:nvPicPr>
+        <p:blipFill>
+          <a:blip r:embed="rId2"/>
+          <a:stretch>
+            <a:fillRect/>
+          </a:stretch>
+        </p:blipFill>
+        <p:spPr>
+          <a:xfrm>
+            <a:off x="499331" y="1097280"/>
+            <a:ext cx="8145337" cy="5303520"/>
+          </a:xfrm>
+          <a:prstGeom prst="rect">
+            <a:avLst/>
+          </a:prstGeom>
+        </p:spPr>
+      </p:pic>
     </p:spTree>
   </p:cSld>
   <p:clrMapOvr>
@@ -4107,7 +4483,7 @@
                   <a:srgbClr val="0B3D2E"/>
                 </a:solidFill>
               </a:rPr>
-              <a:t>📖 Definiciones y características</a:t>
+              <a:t>🧠 Explicación en profundidad</a:t>
             </a:r>
           </a:p>
         </p:txBody>
@@ -4145,97 +4521,97 @@
                   <a:srgbClr val="22282E"/>
                 </a:solidFill>
               </a:rPr>
-              <a:t>•  Análisis dinámico: estudio del binario mientras corre. Clave: revela datos y rutas que el</a:t>
-            </a:r>
-          </a:p>
-          <a:p>
-            <a:pPr>
-              <a:spcAft>
-                <a:spcPts val="600"/>
-              </a:spcAft>
-            </a:pPr>
-            <a:r>
-              <a:rPr sz="1500">
-                <a:solidFill>
-                  <a:srgbClr val="22282E"/>
-                </a:solidFill>
-              </a:rPr>
-              <a:t>•  estático no ve.</a:t>
-            </a:r>
-          </a:p>
-          <a:p>
-            <a:pPr>
-              <a:spcAft>
-                <a:spcPts val="600"/>
-              </a:spcAft>
-            </a:pPr>
-            <a:r>
-              <a:rPr sz="1500">
-                <a:solidFill>
-                  <a:srgbClr val="22282E"/>
-                </a:solidFill>
-              </a:rPr>
-              <a:t>•  strace / ltrace: trazan syscalls y llamadas a librerías con sus argumentos. Clave: ltrace</a:t>
-            </a:r>
-          </a:p>
-          <a:p>
-            <a:pPr>
-              <a:spcAft>
-                <a:spcPts val="600"/>
-              </a:spcAft>
-            </a:pPr>
-            <a:r>
-              <a:rPr sz="1500">
-                <a:solidFill>
-                  <a:srgbClr val="22282E"/>
-                </a:solidFill>
-              </a:rPr>
-              <a:t>•  muestra el strcmp(input, "clave") directamente.</a:t>
-            </a:r>
-          </a:p>
-          <a:p>
-            <a:pPr>
-              <a:spcAft>
-                <a:spcPts val="600"/>
-              </a:spcAft>
-            </a:pPr>
-            <a:r>
-              <a:rPr sz="1500">
-                <a:solidFill>
-                  <a:srgbClr val="22282E"/>
-                </a:solidFill>
-              </a:rPr>
-              <a:t>•  Breakpoint condicional: se detiene solo si una condición se cumple. Clave: break f if x==0x41</a:t>
-            </a:r>
-          </a:p>
-          <a:p>
-            <a:pPr>
-              <a:spcAft>
-                <a:spcPts val="600"/>
-              </a:spcAft>
-            </a:pPr>
-            <a:r>
-              <a:rPr sz="1500">
-                <a:solidFill>
-                  <a:srgbClr val="22282E"/>
-                </a:solidFill>
-              </a:rPr>
-              <a:t>•  evita paradas inútiles.</a:t>
-            </a:r>
-          </a:p>
-          <a:p>
-            <a:pPr>
-              <a:spcAft>
-                <a:spcPts val="600"/>
-              </a:spcAft>
-            </a:pPr>
-            <a:r>
-              <a:rPr sz="1500">
-                <a:solidFill>
-                  <a:srgbClr val="22282E"/>
-                </a:solidFill>
-              </a:rPr>
-              <a:t>•  Frida: toolkit de instrumentación dinámica con scripts JS. Clave: hookea funciones y modifica</a:t>
+              <a:t>•  El análisis dinámico complementa al estático ejecutando el binario y observando su</a:t>
+            </a:r>
+          </a:p>
+          <a:p>
+            <a:pPr>
+              <a:spcAft>
+                <a:spcPts val="600"/>
+              </a:spcAft>
+            </a:pPr>
+            <a:r>
+              <a:rPr sz="1500">
+                <a:solidFill>
+                  <a:srgbClr val="22282E"/>
+                </a:solidFill>
+              </a:rPr>
+              <a:t>•  comportamiento real. Su ventaja es enorme: muestra lo que el programa hace de verdad —qué</a:t>
+            </a:r>
+          </a:p>
+          <a:p>
+            <a:pPr>
+              <a:spcAft>
+                <a:spcPts val="600"/>
+              </a:spcAft>
+            </a:pPr>
+            <a:r>
+              <a:rPr sz="1500">
+                <a:solidFill>
+                  <a:srgbClr val="22282E"/>
+                </a:solidFill>
+              </a:rPr>
+              <a:t>•  ficheros abre, qué conexiones hace, qué memoria toca, cómo se desempaqueta— sin tener que deducirlo del</a:t>
+            </a:r>
+          </a:p>
+          <a:p>
+            <a:pPr>
+              <a:spcAft>
+                <a:spcPts val="600"/>
+              </a:spcAft>
+            </a:pPr>
+            <a:r>
+              <a:rPr sz="1500">
+                <a:solidFill>
+                  <a:srgbClr val="22282E"/>
+                </a:solidFill>
+              </a:rPr>
+              <a:t>•  código, y atraviesa la ofuscación que frena al análisis estático (un binario empaquetado, al</a:t>
+            </a:r>
+          </a:p>
+          <a:p>
+            <a:pPr>
+              <a:spcAft>
+                <a:spcPts val="600"/>
+              </a:spcAft>
+            </a:pPr>
+            <a:r>
+              <a:rPr sz="1500">
+                <a:solidFill>
+                  <a:srgbClr val="22282E"/>
+                </a:solidFill>
+              </a:rPr>
+              <a:t>•  ejecutarse, revela su código real en memoria). Su limitación es que solo observa los caminos que</a:t>
+            </a:r>
+          </a:p>
+          <a:p>
+            <a:pPr>
+              <a:spcAft>
+                <a:spcPts val="600"/>
+              </a:spcAft>
+            </a:pPr>
+            <a:r>
+              <a:rPr sz="1500">
+                <a:solidFill>
+                  <a:srgbClr val="22282E"/>
+                </a:solidFill>
+              </a:rPr>
+              <a:t>•  efectivamente se ejecutan en esa corrida, no todos los posibles. Y tiene un riesgo que define su</a:t>
+            </a:r>
+          </a:p>
+          <a:p>
+            <a:pPr>
+              <a:spcAft>
+                <a:spcPts val="600"/>
+              </a:spcAft>
+            </a:pPr>
+            <a:r>
+              <a:rPr sz="1500">
+                <a:solidFill>
+                  <a:srgbClr val="22282E"/>
+                </a:solidFill>
+              </a:rPr>
+              <a:t>•  metodología: ejecutar código potencialmente malicioso, de ahí que el primer requisito, no</a:t>
             </a:r>
           </a:p>
         </p:txBody>
@@ -4286,7 +4662,7 @@
                   <a:srgbClr val="0B3D2E"/>
                 </a:solidFill>
               </a:rPr>
-              <a:t>🧰 Herramientas y preparación</a:t>
+              <a:t>📖 Definiciones y características</a:t>
             </a:r>
           </a:p>
         </p:txBody>
@@ -4324,37 +4700,97 @@
                   <a:srgbClr val="22282E"/>
                 </a:solidFill>
               </a:rPr>
-              <a:t>•  sudo apt install -y strace ltrace gdb</a:t>
-            </a:r>
-          </a:p>
-          <a:p>
-            <a:pPr>
-              <a:spcAft>
-                <a:spcPts val="600"/>
-              </a:spcAft>
-            </a:pPr>
-            <a:r>
-              <a:rPr sz="1500">
-                <a:solidFill>
-                  <a:srgbClr val="22282E"/>
-                </a:solidFill>
-              </a:rPr>
-              <a:t>•  pip install frida-tools unicorn qiling</a:t>
-            </a:r>
-          </a:p>
-          <a:p>
-            <a:pPr>
-              <a:spcAft>
-                <a:spcPts val="600"/>
-              </a:spcAft>
-            </a:pPr>
-            <a:r>
-              <a:rPr sz="1500">
-                <a:solidFill>
-                  <a:srgbClr val="22282E"/>
-                </a:solidFill>
-              </a:rPr>
-              <a:t>•  Usa una VM aislada con snapshot previo. Nunca ejecutes muestras desconocidas en tu host.</a:t>
+              <a:t>•  Análisis dinámico: estudio del binario mientras corre. Clave: revela datos y rutas que el</a:t>
+            </a:r>
+          </a:p>
+          <a:p>
+            <a:pPr>
+              <a:spcAft>
+                <a:spcPts val="600"/>
+              </a:spcAft>
+            </a:pPr>
+            <a:r>
+              <a:rPr sz="1500">
+                <a:solidFill>
+                  <a:srgbClr val="22282E"/>
+                </a:solidFill>
+              </a:rPr>
+              <a:t>•  estático no ve.</a:t>
+            </a:r>
+          </a:p>
+          <a:p>
+            <a:pPr>
+              <a:spcAft>
+                <a:spcPts val="600"/>
+              </a:spcAft>
+            </a:pPr>
+            <a:r>
+              <a:rPr sz="1500">
+                <a:solidFill>
+                  <a:srgbClr val="22282E"/>
+                </a:solidFill>
+              </a:rPr>
+              <a:t>•  strace / ltrace: trazan syscalls y llamadas a librerías con sus argumentos. Clave: ltrace</a:t>
+            </a:r>
+          </a:p>
+          <a:p>
+            <a:pPr>
+              <a:spcAft>
+                <a:spcPts val="600"/>
+              </a:spcAft>
+            </a:pPr>
+            <a:r>
+              <a:rPr sz="1500">
+                <a:solidFill>
+                  <a:srgbClr val="22282E"/>
+                </a:solidFill>
+              </a:rPr>
+              <a:t>•  muestra el strcmp(input, "clave") directamente.</a:t>
+            </a:r>
+          </a:p>
+          <a:p>
+            <a:pPr>
+              <a:spcAft>
+                <a:spcPts val="600"/>
+              </a:spcAft>
+            </a:pPr>
+            <a:r>
+              <a:rPr sz="1500">
+                <a:solidFill>
+                  <a:srgbClr val="22282E"/>
+                </a:solidFill>
+              </a:rPr>
+              <a:t>•  Breakpoint condicional: se detiene solo si una condición se cumple. Clave: break f if x==0x41</a:t>
+            </a:r>
+          </a:p>
+          <a:p>
+            <a:pPr>
+              <a:spcAft>
+                <a:spcPts val="600"/>
+              </a:spcAft>
+            </a:pPr>
+            <a:r>
+              <a:rPr sz="1500">
+                <a:solidFill>
+                  <a:srgbClr val="22282E"/>
+                </a:solidFill>
+              </a:rPr>
+              <a:t>•  evita paradas inútiles.</a:t>
+            </a:r>
+          </a:p>
+          <a:p>
+            <a:pPr>
+              <a:spcAft>
+                <a:spcPts val="600"/>
+              </a:spcAft>
+            </a:pPr>
+            <a:r>
+              <a:rPr sz="1500">
+                <a:solidFill>
+                  <a:srgbClr val="22282E"/>
+                </a:solidFill>
+              </a:rPr>
+              <a:t>•  Frida: toolkit de instrumentación dinámica con scripts JS. Clave: hookea funciones y modifica</a:t>
             </a:r>
           </a:p>
         </p:txBody>
@@ -4405,7 +4841,7 @@
                   <a:srgbClr val="0B3D2E"/>
                 </a:solidFill>
               </a:rPr>
-              <a:t>🧪 Laboratorio guiado</a:t>
+              <a:t>📔 Glosario</a:t>
             </a:r>
           </a:p>
         </p:txBody>
@@ -4443,97 +4879,97 @@
                   <a:srgbClr val="22282E"/>
                 </a:solidFill>
               </a:rPr>
-              <a:t>•  Traza syscalls y llamadas de librería del crackme:</a:t>
-            </a:r>
-          </a:p>
-          <a:p>
-            <a:pPr>
-              <a:spcAft>
-                <a:spcPts val="600"/>
-              </a:spcAft>
-            </a:pPr>
-            <a:r>
-              <a:rPr sz="1500">
-                <a:solidFill>
-                  <a:srgbClr val="22282E"/>
-                </a:solidFill>
-              </a:rPr>
-              <a:t>•  strace -f ./crackme            # open/read/write, etc.</a:t>
-            </a:r>
-          </a:p>
-          <a:p>
-            <a:pPr>
-              <a:spcAft>
-                <a:spcPts val="600"/>
-              </a:spcAft>
-            </a:pPr>
-            <a:r>
-              <a:rPr sz="1500">
-                <a:solidFill>
-                  <a:srgbClr val="22282E"/>
-                </a:solidFill>
-              </a:rPr>
-              <a:t>•  ltrace ./crackme               # a menudo revela strcmp(input, "SECRET")</a:t>
-            </a:r>
-          </a:p>
-          <a:p>
-            <a:pPr>
-              <a:spcAft>
-                <a:spcPts val="600"/>
-              </a:spcAft>
-            </a:pPr>
-            <a:r>
-              <a:rPr sz="1500">
-                <a:solidFill>
-                  <a:srgbClr val="22282E"/>
-                </a:solidFill>
-              </a:rPr>
-              <a:t>•  Si ltrace muestra la comparación, ya tienes la clave. Si está ofuscada, sigue con GDB.</a:t>
-            </a:r>
-          </a:p>
-          <a:p>
-            <a:pPr>
-              <a:spcAft>
-                <a:spcPts val="600"/>
-              </a:spcAft>
-            </a:pPr>
-            <a:r>
-              <a:rPr sz="1500">
-                <a:solidFill>
-                  <a:srgbClr val="22282E"/>
-                </a:solidFill>
-              </a:rPr>
-              <a:t>•  GDB con breakpoint condicional y hook automático:</a:t>
-            </a:r>
-          </a:p>
-          <a:p>
-            <a:pPr>
-              <a:spcAft>
-                <a:spcPts val="600"/>
-              </a:spcAft>
-            </a:pPr>
-            <a:r>
-              <a:rPr sz="1500">
-                <a:solidFill>
-                  <a:srgbClr val="22282E"/>
-                </a:solidFill>
-              </a:rPr>
-              <a:t>•  break strcmp</a:t>
-            </a:r>
-          </a:p>
-          <a:p>
-            <a:pPr>
-              <a:spcAft>
-                <a:spcPts val="600"/>
-              </a:spcAft>
-            </a:pPr>
-            <a:r>
-              <a:rPr sz="1500">
-                <a:solidFill>
-                  <a:srgbClr val="22282E"/>
-                </a:solidFill>
-              </a:rPr>
-              <a:t>•  commands</a:t>
+              <a:t>•  Término — Definición concisa</a:t>
+            </a:r>
+          </a:p>
+          <a:p>
+            <a:pPr>
+              <a:spcAft>
+                <a:spcPts val="600"/>
+              </a:spcAft>
+            </a:pPr>
+            <a:r>
+              <a:rPr sz="1500">
+                <a:solidFill>
+                  <a:srgbClr val="22282E"/>
+                </a:solidFill>
+              </a:rPr>
+              <a:t>•  Análisis dinámico — Ejecutar el binario y observar su comportamiento</a:t>
+            </a:r>
+          </a:p>
+          <a:p>
+            <a:pPr>
+              <a:spcAft>
+                <a:spcPts val="600"/>
+              </a:spcAft>
+            </a:pPr>
+            <a:r>
+              <a:rPr sz="1500">
+                <a:solidFill>
+                  <a:srgbClr val="22282E"/>
+                </a:solidFill>
+              </a:rPr>
+              <a:t>•  Aislamiento — VM dedicada con snapshots para ejecutar con seguridad</a:t>
+            </a:r>
+          </a:p>
+          <a:p>
+            <a:pPr>
+              <a:spcAft>
+                <a:spcPts val="600"/>
+              </a:spcAft>
+            </a:pPr>
+            <a:r>
+              <a:rPr sz="1500">
+                <a:solidFill>
+                  <a:srgbClr val="22282E"/>
+                </a:solidFill>
+              </a:rPr>
+              <a:t>•  Snapshot — Estado guardado al que volver tras cada ejecución</a:t>
+            </a:r>
+          </a:p>
+          <a:p>
+            <a:pPr>
+              <a:spcAft>
+                <a:spcPts val="600"/>
+              </a:spcAft>
+            </a:pPr>
+            <a:r>
+              <a:rPr sz="1500">
+                <a:solidFill>
+                  <a:srgbClr val="22282E"/>
+                </a:solidFill>
+              </a:rPr>
+              <a:t>•  strace — Registra las llamadas al sistema del programa</a:t>
+            </a:r>
+          </a:p>
+          <a:p>
+            <a:pPr>
+              <a:spcAft>
+                <a:spcPts val="600"/>
+              </a:spcAft>
+            </a:pPr>
+            <a:r>
+              <a:rPr sz="1500">
+                <a:solidFill>
+                  <a:srgbClr val="22282E"/>
+                </a:solidFill>
+              </a:rPr>
+              <a:t>•  ltrace — Registra las llamadas a funciones de librería</a:t>
+            </a:r>
+          </a:p>
+          <a:p>
+            <a:pPr>
+              <a:spcAft>
+                <a:spcPts val="600"/>
+              </a:spcAft>
+            </a:pPr>
+            <a:r>
+              <a:rPr sz="1500">
+                <a:solidFill>
+                  <a:srgbClr val="22282E"/>
+                </a:solidFill>
+              </a:rPr>
+              <a:t>•  GDB scripting — Automatizar breakpoints y volcado de argumentos</a:t>
             </a:r>
           </a:p>
         </p:txBody>
@@ -4584,7 +5020,7 @@
                   <a:srgbClr val="0B3D2E"/>
                 </a:solidFill>
               </a:rPr>
-              <a:t>✍️ Ejercicios</a:t>
+              <a:t>🧰 Herramientas y preparación</a:t>
             </a:r>
           </a:p>
         </p:txBody>
@@ -4622,82 +5058,7 @@
                   <a:srgbClr val="22282E"/>
                 </a:solidFill>
               </a:rPr>
-              <a:t>•  Encuentra la clave de un crackme usando solo ltrace.</a:t>
-            </a:r>
-          </a:p>
-          <a:p>
-            <a:pPr>
-              <a:spcAft>
-                <a:spcPts val="600"/>
-              </a:spcAft>
-            </a:pPr>
-            <a:r>
-              <a:rPr sz="1500">
-                <a:solidFill>
-                  <a:srgbClr val="22282E"/>
-                </a:solidFill>
-              </a:rPr>
-              <a:t>•  Escribe un script GDB que registre cada strcmp sin detenerse.</a:t>
-            </a:r>
-          </a:p>
-          <a:p>
-            <a:pPr>
-              <a:spcAft>
-                <a:spcPts val="600"/>
-              </a:spcAft>
-            </a:pPr>
-            <a:r>
-              <a:rPr sz="1500">
-                <a:solidFill>
-                  <a:srgbClr val="22282E"/>
-                </a:solidFill>
-              </a:rPr>
-              <a:t>•  Hookea con Frida una función y modifica su valor de retorno.</a:t>
-            </a:r>
-          </a:p>
-          <a:p>
-            <a:pPr>
-              <a:spcAft>
-                <a:spcPts val="600"/>
-              </a:spcAft>
-            </a:pPr>
-            <a:r>
-              <a:rPr sz="1500">
-                <a:solidFill>
-                  <a:srgbClr val="22282E"/>
-                </a:solidFill>
-              </a:rPr>
-              <a:t>•  Diferencia qué revela strace frente a ltrace.</a:t>
-            </a:r>
-          </a:p>
-          <a:p>
-            <a:pPr>
-              <a:spcAft>
-                <a:spcPts val="600"/>
-              </a:spcAft>
-            </a:pPr>
-            <a:r>
-              <a:rPr sz="1500">
-                <a:solidFill>
-                  <a:srgbClr val="22282E"/>
-                </a:solidFill>
-              </a:rPr>
-              <a:t>•  Emula una función pequeña con Qiling y compara con la ejecución real.</a:t>
-            </a:r>
-          </a:p>
-          <a:p>
-            <a:pPr>
-              <a:spcAft>
-                <a:spcPts val="600"/>
-              </a:spcAft>
-            </a:pPr>
-            <a:r>
-              <a:rPr sz="1500">
-                <a:solidFill>
-                  <a:srgbClr val="22282E"/>
-                </a:solidFill>
-              </a:rPr>
-              <a:t>•  Extrae una cadena descifrada de memoria con dump memory.</a:t>
+              <a:t>•  Usa una VM aislada con snapshot previo. Nunca ejecutes muestras desconocidas en tu host.</a:t>
             </a:r>
           </a:p>
         </p:txBody>
@@ -4748,7 +5109,7 @@
                   <a:srgbClr val="0B3D2E"/>
                 </a:solidFill>
               </a:rPr>
-              <a:t>📝 Reto verificable</a:t>
+              <a:t>🧪 Laboratorio guiado</a:t>
             </a:r>
           </a:p>
         </p:txBody>
@@ -4786,52 +5147,97 @@
                   <a:srgbClr val="22282E"/>
                 </a:solidFill>
               </a:rPr>
-              <a:t>•  Deduce la clave de un crackme que descifra su comparación en runtime, usando análisis dinámico</a:t>
-            </a:r>
-          </a:p>
-          <a:p>
-            <a:pPr>
-              <a:spcAft>
-                <a:spcPts val="600"/>
-              </a:spcAft>
-            </a:pPr>
-            <a:r>
-              <a:rPr sz="1500">
-                <a:solidFill>
-                  <a:srgbClr val="22282E"/>
-                </a:solidFill>
-              </a:rPr>
-              <a:t>•  (ltrace, GDB o Frida).</a:t>
-            </a:r>
-          </a:p>
-          <a:p>
-            <a:pPr>
-              <a:spcAft>
-                <a:spcPts val="600"/>
-              </a:spcAft>
-            </a:pPr>
-            <a:r>
-              <a:rPr sz="1500">
-                <a:solidFill>
-                  <a:srgbClr val="22282E"/>
-                </a:solidFill>
-              </a:rPr>
-              <a:t>•  Criterio de aceptación: obtienes la clave correcta y explicas con qué herramienta/hook la</a:t>
-            </a:r>
-          </a:p>
-          <a:p>
-            <a:pPr>
-              <a:spcAft>
-                <a:spcPts val="600"/>
-              </a:spcAft>
-            </a:pPr>
-            <a:r>
-              <a:rPr sz="1500">
-                <a:solidFill>
-                  <a:srgbClr val="22282E"/>
-                </a:solidFill>
-              </a:rPr>
-              <a:t>•  capturaste en el momento de la comparación.</a:t>
+              <a:t>•  Traza syscalls y llamadas de librería del crackme:</a:t>
+            </a:r>
+          </a:p>
+          <a:p>
+            <a:pPr>
+              <a:spcAft>
+                <a:spcPts val="600"/>
+              </a:spcAft>
+            </a:pPr>
+            <a:r>
+              <a:rPr sz="1500">
+                <a:solidFill>
+                  <a:srgbClr val="22282E"/>
+                </a:solidFill>
+              </a:rPr>
+              <a:t>•  Si ltrace muestra la comparación, ya tienes la clave. Si está ofuscada, sigue con GDB.</a:t>
+            </a:r>
+          </a:p>
+          <a:p>
+            <a:pPr>
+              <a:spcAft>
+                <a:spcPts val="600"/>
+              </a:spcAft>
+            </a:pPr>
+            <a:r>
+              <a:rPr sz="1500">
+                <a:solidFill>
+                  <a:srgbClr val="22282E"/>
+                </a:solidFill>
+              </a:rPr>
+              <a:t>•  GDB con breakpoint condicional y hook automático:</a:t>
+            </a:r>
+          </a:p>
+          <a:p>
+            <a:pPr>
+              <a:spcAft>
+                <a:spcPts val="600"/>
+              </a:spcAft>
+            </a:pPr>
+            <a:r>
+              <a:rPr sz="1500">
+                <a:solidFill>
+                  <a:srgbClr val="22282E"/>
+                </a:solidFill>
+              </a:rPr>
+              <a:t>•  Instrumenta con Frida para interceptar una función y leer sus argumentos sin recompilar:</a:t>
+            </a:r>
+          </a:p>
+          <a:p>
+            <a:pPr>
+              <a:spcAft>
+                <a:spcPts val="600"/>
+              </a:spcAft>
+            </a:pPr>
+            <a:r>
+              <a:rPr sz="1500">
+                <a:solidFill>
+                  <a:srgbClr val="22282E"/>
+                </a:solidFill>
+              </a:rPr>
+              <a:t>•  Vuelca memoria para extraer una cadena descifrada en runtime (dump memory out.bin $addr $addr+64).</a:t>
+            </a:r>
+          </a:p>
+          <a:p>
+            <a:pPr>
+              <a:spcAft>
+                <a:spcPts val="600"/>
+              </a:spcAft>
+            </a:pPr>
+            <a:r>
+              <a:rPr sz="1500">
+                <a:solidFill>
+                  <a:srgbClr val="22282E"/>
+                </a:solidFill>
+              </a:rPr>
+              <a:t>•  (Opcional) Emula una rutina de descifrado con Unicorn/Qiling para obtener la salida sin el binario</a:t>
+            </a:r>
+          </a:p>
+          <a:p>
+            <a:pPr>
+              <a:spcAft>
+                <a:spcPts val="600"/>
+              </a:spcAft>
+            </a:pPr>
+            <a:r>
+              <a:rPr sz="1500">
+                <a:solidFill>
+                  <a:srgbClr val="22282E"/>
+                </a:solidFill>
+              </a:rPr>
+              <a:t>•  completo.</a:t>
             </a:r>
           </a:p>
         </p:txBody>
